--- a/slides/output/第十组-校园网络仿真项目汇报.pptx
+++ b/slides/output/第十组-校园网络仿真项目汇报.pptx
@@ -505,7 +505,37 @@
           <a:bodyPr/>
           <a:lstStyle/>
           <a:p>
-            <a:endParaRPr lang="en-US" dirty="0"/>
+            <a:r>
+              <a:rPr lang="zh-CN" altLang="en-US" dirty="0"/>
+              <a:t>我们项目的核心思路是：在一个轻量级网络仿真平台上，构建一所虚拟大学的校园网络，并且在上面部署 </a:t>
+            </a:r>
+            <a:r>
+              <a:rPr lang="en-US" altLang="zh-CN" dirty="0"/>
+              <a:t>QoS </a:t>
+            </a:r>
+            <a:r>
+              <a:rPr lang="zh-CN" altLang="en-US" dirty="0"/>
+              <a:t>流量整形、负载均衡、安全策略这三个关键机制，然后用消融实验的方法来量化评估每一项策略的实际效果。</a:t>
+            </a:r>
+            <a:endParaRPr lang="zh-CN" altLang="en-US" dirty="0"/>
+          </a:p>
+          <a:p>
+            <a:endParaRPr lang="en-US" altLang="zh-CN" dirty="0"/>
+          </a:p>
+          <a:p>
+            <a:r>
+              <a:rPr lang="zh-CN" altLang="en-US" dirty="0"/>
+              <a:t>接下来我将从网络拓扑设计、连通性验证、三个核心消融实验，以及 </a:t>
+            </a:r>
+            <a:r>
+              <a:rPr lang="en-US" altLang="zh-CN" dirty="0"/>
+              <a:t>VPN </a:t>
+            </a:r>
+            <a:r>
+              <a:rPr lang="zh-CN" altLang="en-US" dirty="0"/>
+              <a:t>远程接入这几个方面，依次向大家汇报我们的工作。</a:t>
+            </a:r>
+            <a:endParaRPr lang="zh-CN" altLang="en-US" dirty="0"/>
           </a:p>
         </p:txBody>
       </p:sp>
@@ -583,7 +613,107 @@
           <a:bodyPr/>
           <a:lstStyle/>
           <a:p>
-            <a:endParaRPr lang="en-US" dirty="0"/>
+            <a:r>
+              <a:rPr lang="zh-CN" altLang="en-US" dirty="0"/>
+              <a:t>汇报分为六个部分。</a:t>
+            </a:r>
+            <a:endParaRPr lang="zh-CN" altLang="en-US" dirty="0"/>
+          </a:p>
+          <a:p>
+            <a:endParaRPr lang="en-US" altLang="zh-CN" dirty="0"/>
+          </a:p>
+          <a:p>
+            <a:r>
+              <a:rPr lang="zh-CN" altLang="en-US" dirty="0"/>
+              <a:t>首先介绍我们设计的网络拓扑——六类业务区域、双服务器架构，以及宿舍和教学楼采用的三层交换结构。</a:t>
+            </a:r>
+            <a:endParaRPr lang="zh-CN" altLang="en-US" dirty="0"/>
+          </a:p>
+          <a:p>
+            <a:endParaRPr lang="en-US" altLang="zh-CN" dirty="0"/>
+          </a:p>
+          <a:p>
+            <a:r>
+              <a:rPr lang="zh-CN" altLang="en-US" dirty="0"/>
+              <a:t>然后验证基础连通性，确保所有区域之间的路由和转发路径是正确的。</a:t>
+            </a:r>
+            <a:endParaRPr lang="zh-CN" altLang="en-US" dirty="0"/>
+          </a:p>
+          <a:p>
+            <a:endParaRPr lang="en-US" altLang="zh-CN" dirty="0"/>
+          </a:p>
+          <a:p>
+            <a:r>
+              <a:rPr lang="zh-CN" altLang="en-US" dirty="0"/>
+              <a:t>接下来的三部分是核心实验：</a:t>
+            </a:r>
+            <a:r>
+              <a:rPr lang="en-US" altLang="zh-CN" dirty="0"/>
+              <a:t>QoS </a:t>
+            </a:r>
+            <a:r>
+              <a:rPr lang="zh-CN" altLang="en-US" dirty="0"/>
+              <a:t>消融实验验证 </a:t>
+            </a:r>
+            <a:r>
+              <a:rPr lang="en-US" altLang="zh-CN" dirty="0"/>
+              <a:t>HTB </a:t>
+            </a:r>
+            <a:r>
+              <a:rPr lang="zh-CN" altLang="en-US" dirty="0"/>
+              <a:t>两级优先级队列的效果；负载均衡消融实验验证 </a:t>
+            </a:r>
+            <a:r>
+              <a:rPr lang="en-US" altLang="zh-CN" dirty="0"/>
+              <a:t>Round Robin </a:t>
+            </a:r>
+            <a:r>
+              <a:rPr lang="zh-CN" altLang="en-US" dirty="0"/>
+              <a:t>调度算法的公平性；安全策略消融实验验证 </a:t>
+            </a:r>
+            <a:r>
+              <a:rPr lang="en-US" altLang="zh-CN" dirty="0"/>
+              <a:t>ACL、IDS </a:t>
+            </a:r>
+            <a:r>
+              <a:rPr lang="zh-CN" altLang="en-US" dirty="0"/>
+              <a:t>和 </a:t>
+            </a:r>
+            <a:r>
+              <a:rPr lang="en-US" altLang="zh-CN" dirty="0"/>
+              <a:t>Flood </a:t>
+            </a:r>
+            <a:r>
+              <a:rPr lang="zh-CN" altLang="en-US" dirty="0"/>
+              <a:t>防护的综合效果。</a:t>
+            </a:r>
+            <a:endParaRPr lang="zh-CN" altLang="en-US" dirty="0"/>
+          </a:p>
+          <a:p>
+            <a:endParaRPr lang="en-US" altLang="zh-CN" dirty="0"/>
+          </a:p>
+          <a:p>
+            <a:r>
+              <a:rPr lang="zh-CN" altLang="en-US" dirty="0"/>
+              <a:t>最后一部分演示 </a:t>
+            </a:r>
+            <a:r>
+              <a:rPr lang="en-US" altLang="zh-CN" dirty="0"/>
+              <a:t>VPN </a:t>
+            </a:r>
+            <a:r>
+              <a:rPr lang="zh-CN" altLang="en-US" dirty="0"/>
+              <a:t>远程接入和双层 </a:t>
+            </a:r>
+            <a:r>
+              <a:rPr lang="en-US" altLang="zh-CN" dirty="0"/>
+              <a:t>ACL——</a:t>
+            </a:r>
+            <a:r>
+              <a:rPr lang="zh-CN" altLang="en-US" dirty="0"/>
+              <a:t>这是模拟校外师生通过公网安全访问校园网的场景。</a:t>
+            </a:r>
+            <a:endParaRPr lang="zh-CN" altLang="en-US" dirty="0"/>
           </a:p>
         </p:txBody>
       </p:sp>
@@ -661,7 +791,309 @@
           <a:bodyPr/>
           <a:lstStyle/>
           <a:p>
-            <a:endParaRPr lang="en-US" dirty="0"/>
+            <a:r>
+              <a:rPr lang="zh-CN" altLang="en-US" dirty="0"/>
+              <a:t>这是我们设计的网络拓扑。校园网分为六个功能区域：宿舍区、教学楼、图书馆、办公楼、财务处和人事处。每个区域分配独立的 </a:t>
+            </a:r>
+            <a:r>
+              <a:rPr lang="en-US" altLang="zh-CN" dirty="0"/>
+              <a:t>IP </a:t>
+            </a:r>
+            <a:r>
+              <a:rPr lang="zh-CN" altLang="en-US" dirty="0"/>
+              <a:t>子网，比如宿舍区使用 10.0.0.0/20，办公楼使用 10.0.34.0/24，敏感区域财务处和人事处使用更小的子网掩码，体现安全隔离的设计意图。</a:t>
+            </a:r>
+            <a:endParaRPr lang="zh-CN" altLang="en-US" dirty="0"/>
+          </a:p>
+          <a:p>
+            <a:endParaRPr lang="en-US" altLang="zh-CN" dirty="0"/>
+          </a:p>
+          <a:p>
+            <a:r>
+              <a:rPr lang="zh-CN" altLang="en-US" dirty="0"/>
+              <a:t>所有区域通过一台核心路由器 </a:t>
+            </a:r>
+            <a:r>
+              <a:rPr lang="en-US" altLang="zh-CN" dirty="0"/>
+              <a:t>r1 </a:t>
+            </a:r>
+            <a:r>
+              <a:rPr lang="zh-CN" altLang="en-US" dirty="0"/>
+              <a:t>实现三层互联，</a:t>
+            </a:r>
+            <a:r>
+              <a:rPr lang="en-US" altLang="zh-CN" dirty="0"/>
+              <a:t>r1 </a:t>
+            </a:r>
+            <a:r>
+              <a:rPr lang="zh-CN" altLang="en-US" dirty="0"/>
+              <a:t>上运行 </a:t>
+            </a:r>
+            <a:r>
+              <a:rPr lang="en-US" altLang="zh-CN" dirty="0"/>
+              <a:t>Linux </a:t>
+            </a:r>
+            <a:r>
+              <a:rPr lang="zh-CN" altLang="en-US" dirty="0"/>
+              <a:t>内核的原生 </a:t>
+            </a:r>
+            <a:r>
+              <a:rPr lang="en-US" altLang="zh-CN" dirty="0"/>
+              <a:t>IP </a:t>
+            </a:r>
+            <a:r>
+              <a:rPr lang="zh-CN" altLang="en-US" dirty="0"/>
+              <a:t>转发，这是我们部署 </a:t>
+            </a:r>
+            <a:r>
+              <a:rPr lang="en-US" altLang="zh-CN" dirty="0"/>
+              <a:t>iptables </a:t>
+            </a:r>
+            <a:r>
+              <a:rPr lang="zh-CN" altLang="en-US" dirty="0"/>
+              <a:t>防火墙规则的位置。</a:t>
+            </a:r>
+            <a:endParaRPr lang="zh-CN" altLang="en-US" dirty="0"/>
+          </a:p>
+          <a:p>
+            <a:endParaRPr lang="en-US" altLang="zh-CN" dirty="0"/>
+          </a:p>
+          <a:p>
+            <a:r>
+              <a:rPr lang="zh-CN" altLang="en-US" dirty="0"/>
+              <a:t>宿舍和教学楼的终端数量较多，采用了接入-汇聚二级交换结构：3 台接入交换机连接到 1 台汇聚交换机，再接入核心路由器。</a:t>
+            </a:r>
+            <a:endParaRPr lang="zh-CN" altLang="en-US" dirty="0"/>
+          </a:p>
+          <a:p>
+            <a:endParaRPr lang="en-US" altLang="zh-CN" dirty="0"/>
+          </a:p>
+          <a:p>
+            <a:r>
+              <a:rPr lang="zh-CN" altLang="en-US" dirty="0"/>
+              <a:t>后端有两台服务器，分别通过独立的上行链路连接到 </a:t>
+            </a:r>
+            <a:r>
+              <a:rPr lang="en-US" altLang="zh-CN" dirty="0"/>
+              <a:t>r1——</a:t>
+            </a:r>
+            <a:r>
+              <a:rPr lang="zh-CN" altLang="en-US" dirty="0"/>
+              <a:t>这是后面负载均衡实验的物理基础，两台服务器的链路各 20 </a:t>
+            </a:r>
+            <a:r>
+              <a:rPr lang="en-US" altLang="zh-CN" dirty="0"/>
+              <a:t>Mbps </a:t>
+            </a:r>
+            <a:r>
+              <a:rPr lang="zh-CN" altLang="en-US" dirty="0"/>
+              <a:t>带宽上限。</a:t>
+            </a:r>
+            <a:endParaRPr lang="zh-CN" altLang="en-US" dirty="0"/>
+          </a:p>
+          <a:p>
+            <a:endParaRPr lang="zh-CN" altLang="en-US" dirty="0"/>
+          </a:p>
+          <a:p>
+            <a:r>
+              <a:rPr lang="zh-CN" altLang="en-US" dirty="0"/>
+              <a:t>关于</a:t>
+            </a:r>
+            <a:r>
+              <a:rPr lang="en-US" altLang="zh-CN" dirty="0"/>
+              <a:t>iptables:</a:t>
+            </a:r>
+            <a:br>
+              <a:rPr lang="en-US" altLang="zh-CN" dirty="0"/>
+            </a:br>
+            <a:r>
+              <a:rPr lang="en-US" altLang="zh-CN" dirty="0"/>
+              <a:t>iptables </a:t>
+            </a:r>
+            <a:r>
+              <a:rPr lang="zh-CN" altLang="en-US" dirty="0"/>
+              <a:t>是 </a:t>
+            </a:r>
+            <a:r>
+              <a:rPr lang="en-US" altLang="zh-CN" dirty="0"/>
+              <a:t>Linux </a:t>
+            </a:r>
+            <a:r>
+              <a:rPr lang="zh-CN" altLang="en-US" dirty="0"/>
+              <a:t>内核的包过滤防火墙管理工具，它操作 </a:t>
+            </a:r>
+            <a:r>
+              <a:rPr lang="en-US" altLang="zh-CN" dirty="0"/>
+              <a:t>netfilter </a:t>
+            </a:r>
+            <a:r>
+              <a:rPr lang="zh-CN" altLang="en-US" dirty="0"/>
+              <a:t>框架来实现网络流量的拦截、放行或修改。</a:t>
+            </a:r>
+            <a:endParaRPr lang="en-US" altLang="zh-CN" dirty="0"/>
+          </a:p>
+          <a:p>
+            <a:r>
+              <a:rPr lang="zh-CN" altLang="en-US" dirty="0"/>
+              <a:t>核心概念：</a:t>
+            </a:r>
+            <a:endParaRPr lang="en-US" altLang="zh-CN" dirty="0"/>
+          </a:p>
+          <a:p>
+            <a:r>
+              <a:rPr lang="zh-CN" altLang="en-US" dirty="0"/>
+              <a:t>表（</a:t>
+            </a:r>
+            <a:r>
+              <a:rPr lang="en-US" altLang="zh-CN" dirty="0"/>
+              <a:t>Table）：filter（</a:t>
+            </a:r>
+            <a:r>
+              <a:rPr lang="zh-CN" altLang="en-US" dirty="0"/>
+              <a:t>过滤）、</a:t>
+            </a:r>
+            <a:r>
+              <a:rPr lang="en-US" altLang="zh-CN" dirty="0"/>
+              <a:t>nat（</a:t>
+            </a:r>
+            <a:r>
+              <a:rPr lang="zh-CN" altLang="en-US" dirty="0"/>
+              <a:t>地址转换）、</a:t>
+            </a:r>
+            <a:r>
+              <a:rPr lang="en-US" altLang="zh-CN" dirty="0"/>
+              <a:t>mangle（</a:t>
+            </a:r>
+            <a:r>
+              <a:rPr lang="zh-CN" altLang="en-US" dirty="0"/>
+              <a:t>修改包）等</a:t>
+            </a:r>
+            <a:endParaRPr lang="zh-CN" altLang="en-US" dirty="0"/>
+          </a:p>
+          <a:p>
+            <a:r>
+              <a:rPr lang="zh-CN" altLang="en-US" dirty="0"/>
+              <a:t>链（</a:t>
+            </a:r>
+            <a:r>
+              <a:rPr lang="en-US" altLang="zh-CN" dirty="0"/>
+              <a:t>Chain）：</a:t>
+            </a:r>
+            <a:r>
+              <a:rPr lang="zh-CN" altLang="en-US" dirty="0"/>
+              <a:t>包经过的钩子点，如 </a:t>
+            </a:r>
+            <a:r>
+              <a:rPr lang="en-US" altLang="zh-CN" dirty="0"/>
+              <a:t>INPUT（</a:t>
+            </a:r>
+            <a:r>
+              <a:rPr lang="zh-CN" altLang="en-US" dirty="0"/>
+              <a:t>进本机）、</a:t>
+            </a:r>
+            <a:r>
+              <a:rPr lang="en-US" altLang="zh-CN" dirty="0"/>
+              <a:t>OUTPUT（</a:t>
+            </a:r>
+            <a:r>
+              <a:rPr lang="zh-CN" altLang="en-US" dirty="0"/>
+              <a:t>出本机）、</a:t>
+            </a:r>
+            <a:r>
+              <a:rPr lang="en-US" altLang="zh-CN" dirty="0"/>
+              <a:t>FORWARD（</a:t>
+            </a:r>
+            <a:r>
+              <a:rPr lang="zh-CN" altLang="en-US" dirty="0"/>
+              <a:t>转发）、</a:t>
+            </a:r>
+            <a:r>
+              <a:rPr lang="en-US" altLang="zh-CN" dirty="0"/>
+              <a:t>PREROUTING/POSTROUTING（</a:t>
+            </a:r>
+            <a:r>
+              <a:rPr lang="zh-CN" altLang="en-US" dirty="0"/>
+              <a:t>路由前后）</a:t>
+            </a:r>
+            <a:endParaRPr lang="zh-CN" altLang="en-US" dirty="0"/>
+          </a:p>
+          <a:p>
+            <a:r>
+              <a:rPr lang="zh-CN" altLang="en-US" dirty="0"/>
+              <a:t>规则（</a:t>
+            </a:r>
+            <a:r>
+              <a:rPr lang="en-US" altLang="zh-CN" dirty="0"/>
+              <a:t>Rule）：</a:t>
+            </a:r>
+            <a:r>
+              <a:rPr lang="zh-CN" altLang="en-US" dirty="0"/>
+              <a:t>匹配条件 + 动作（</a:t>
+            </a:r>
+            <a:r>
+              <a:rPr lang="en-US" altLang="zh-CN" dirty="0"/>
+              <a:t>ACCEPT </a:t>
+            </a:r>
+            <a:r>
+              <a:rPr lang="zh-CN" altLang="en-US" dirty="0"/>
+              <a:t>放行、</a:t>
+            </a:r>
+            <a:r>
+              <a:rPr lang="en-US" altLang="zh-CN" dirty="0"/>
+              <a:t>DROP </a:t>
+            </a:r>
+            <a:r>
+              <a:rPr lang="zh-CN" altLang="en-US" dirty="0"/>
+              <a:t>丢弃、</a:t>
+            </a:r>
+            <a:r>
+              <a:rPr lang="en-US" altLang="zh-CN" dirty="0"/>
+              <a:t>LOG </a:t>
+            </a:r>
+            <a:r>
+              <a:rPr lang="zh-CN" altLang="en-US" dirty="0"/>
+              <a:t>记录日志）</a:t>
+            </a:r>
+            <a:endParaRPr lang="zh-CN" altLang="en-US" dirty="0"/>
+          </a:p>
+          <a:p>
+            <a:r>
+              <a:rPr lang="zh-CN" altLang="en-US" dirty="0"/>
+              <a:t>在我们的项目中，所有 </a:t>
+            </a:r>
+            <a:r>
+              <a:rPr lang="en-US" altLang="zh-CN" dirty="0"/>
+              <a:t>ACL </a:t>
+            </a:r>
+            <a:r>
+              <a:rPr lang="zh-CN" altLang="en-US" dirty="0"/>
+              <a:t>规则都部署在 </a:t>
+            </a:r>
+            <a:r>
+              <a:rPr lang="en-US" altLang="zh-CN" dirty="0"/>
+              <a:t>r1 </a:t>
+            </a:r>
+            <a:r>
+              <a:rPr lang="zh-CN" altLang="en-US" dirty="0"/>
+              <a:t>的 </a:t>
+            </a:r>
+            <a:r>
+              <a:rPr lang="en-US" altLang="zh-CN" dirty="0"/>
+              <a:t>FORWARD </a:t>
+            </a:r>
+            <a:r>
+              <a:rPr lang="zh-CN" altLang="en-US" dirty="0"/>
+              <a:t>链上——因为 </a:t>
+            </a:r>
+            <a:r>
+              <a:rPr lang="en-US" altLang="zh-CN" dirty="0"/>
+              <a:t>r1 </a:t>
+            </a:r>
+            <a:r>
+              <a:rPr lang="zh-CN" altLang="en-US" dirty="0"/>
+              <a:t>是核心路由器，跨区域流量都经过它转发。</a:t>
+            </a:r>
+            <a:endParaRPr lang="zh-CN" altLang="en-US" dirty="0"/>
           </a:p>
         </p:txBody>
       </p:sp>
@@ -739,7 +1171,149 @@
           <a:bodyPr/>
           <a:lstStyle/>
           <a:p>
-            <a:endParaRPr lang="en-US" dirty="0"/>
+            <a:r>
+              <a:rPr lang="zh-CN" altLang="en-US" dirty="0"/>
+              <a:t>在部署策略之前，我们首先验证了整个拓扑的 </a:t>
+            </a:r>
+            <a:r>
+              <a:rPr lang="en-US" altLang="zh-CN" dirty="0"/>
+              <a:t>IP </a:t>
+            </a:r>
+            <a:r>
+              <a:rPr lang="zh-CN" altLang="en-US" dirty="0"/>
+              <a:t>层连通性。</a:t>
+            </a:r>
+            <a:endParaRPr lang="zh-CN" altLang="en-US" dirty="0"/>
+          </a:p>
+          <a:p>
+            <a:endParaRPr lang="en-US" altLang="zh-CN" dirty="0"/>
+          </a:p>
+          <a:p>
+            <a:r>
+              <a:rPr lang="zh-CN" altLang="en-US" dirty="0"/>
+              <a:t>我们测试了五条有代表性的路径。第一条 </a:t>
+            </a:r>
+            <a:r>
+              <a:rPr lang="en-US" altLang="zh-CN" dirty="0"/>
+              <a:t>dorm1 </a:t>
+            </a:r>
+            <a:r>
+              <a:rPr lang="zh-CN" altLang="en-US" dirty="0"/>
+              <a:t>到 </a:t>
+            </a:r>
+            <a:r>
+              <a:rPr lang="en-US" altLang="zh-CN" dirty="0"/>
+              <a:t>finance2——</a:t>
+            </a:r>
+            <a:r>
+              <a:rPr lang="zh-CN" altLang="en-US" dirty="0"/>
+              <a:t>宿舍到财务处——这个是 </a:t>
+            </a:r>
+            <a:r>
+              <a:rPr lang="en-US" altLang="zh-CN" dirty="0"/>
+              <a:t>ACL </a:t>
+            </a:r>
+            <a:r>
+              <a:rPr lang="zh-CN" altLang="en-US" dirty="0"/>
+              <a:t>黑名单规则要拦截的路径，</a:t>
+            </a:r>
+            <a:r>
+              <a:rPr lang="en-US" altLang="zh-CN" dirty="0"/>
+              <a:t>PING </a:t>
+            </a:r>
+            <a:r>
+              <a:rPr lang="zh-CN" altLang="en-US" dirty="0"/>
+              <a:t>不通，符合预期。</a:t>
+            </a:r>
+            <a:endParaRPr lang="zh-CN" altLang="en-US" dirty="0"/>
+          </a:p>
+          <a:p>
+            <a:endParaRPr lang="en-US" altLang="zh-CN" dirty="0"/>
+          </a:p>
+          <a:p>
+            <a:r>
+              <a:rPr lang="zh-CN" altLang="en-US" dirty="0"/>
+              <a:t>第二条 </a:t>
+            </a:r>
+            <a:r>
+              <a:rPr lang="en-US" altLang="zh-CN" dirty="0"/>
+              <a:t>office1 </a:t>
+            </a:r>
+            <a:r>
+              <a:rPr lang="zh-CN" altLang="en-US" dirty="0"/>
+              <a:t>到 </a:t>
+            </a:r>
+            <a:r>
+              <a:rPr lang="en-US" altLang="zh-CN" dirty="0"/>
+              <a:t>finance1，</a:t>
+            </a:r>
+            <a:r>
+              <a:rPr lang="zh-CN" altLang="en-US" dirty="0"/>
+              <a:t>这是白名单允许的路径，</a:t>
+            </a:r>
+            <a:r>
+              <a:rPr lang="en-US" altLang="zh-CN" dirty="0"/>
+              <a:t>PING </a:t>
+            </a:r>
+            <a:r>
+              <a:rPr lang="zh-CN" altLang="en-US" dirty="0"/>
+              <a:t>成功。</a:t>
+            </a:r>
+            <a:endParaRPr lang="zh-CN" altLang="en-US" dirty="0"/>
+          </a:p>
+          <a:p>
+            <a:endParaRPr lang="en-US" altLang="zh-CN" dirty="0"/>
+          </a:p>
+          <a:p>
+            <a:r>
+              <a:rPr lang="zh-CN" altLang="en-US" dirty="0"/>
+              <a:t>第三条同区域内部通，</a:t>
+            </a:r>
+            <a:r>
+              <a:rPr lang="en-US" altLang="zh-CN" dirty="0"/>
+              <a:t>dorm1 </a:t>
+            </a:r>
+            <a:r>
+              <a:rPr lang="zh-CN" altLang="en-US" dirty="0"/>
+              <a:t>到 </a:t>
+            </a:r>
+            <a:r>
+              <a:rPr lang="en-US" altLang="zh-CN" dirty="0"/>
+              <a:t>dorm2，PING </a:t>
+            </a:r>
+            <a:r>
+              <a:rPr lang="zh-CN" altLang="en-US" dirty="0"/>
+              <a:t>成功，验证了接入交换机和汇聚交换机的二层转发。</a:t>
+            </a:r>
+            <a:endParaRPr lang="zh-CN" altLang="en-US" dirty="0"/>
+          </a:p>
+          <a:p>
+            <a:endParaRPr lang="en-US" altLang="zh-CN" dirty="0"/>
+          </a:p>
+          <a:p>
+            <a:r>
+              <a:rPr lang="zh-CN" altLang="en-US" dirty="0"/>
+              <a:t>第四条和第五条是宿舍到两台服务器，都是通的，验证了双服务器链路的可达性。</a:t>
+            </a:r>
+            <a:endParaRPr lang="zh-CN" altLang="en-US" dirty="0"/>
+          </a:p>
+          <a:p>
+            <a:endParaRPr lang="en-US" altLang="zh-CN" dirty="0"/>
+          </a:p>
+          <a:p>
+            <a:r>
+              <a:rPr lang="zh-CN" altLang="en-US" dirty="0"/>
+              <a:t>这组测试说明：基础拓扑的路由表配置正确，三层交换机和核心路由器的转发路径跑通了，</a:t>
+            </a:r>
+            <a:r>
+              <a:rPr lang="en-US" altLang="zh-CN" dirty="0"/>
+              <a:t>ACL </a:t>
+            </a:r>
+            <a:r>
+              <a:rPr lang="zh-CN" altLang="en-US" dirty="0"/>
+              <a:t>白名单允许的路径正常通，黑名单能正确拦截。这为我们后续在正确的网络基础上部署策略提供了前提。</a:t>
+            </a:r>
+            <a:endParaRPr lang="zh-CN" altLang="en-US" dirty="0"/>
           </a:p>
         </p:txBody>
       </p:sp>
@@ -817,7 +1391,205 @@
           <a:bodyPr/>
           <a:lstStyle/>
           <a:p>
-            <a:endParaRPr lang="en-US" dirty="0"/>
+            <a:r>
+              <a:rPr lang="en-US" altLang="zh-CN" dirty="0"/>
+              <a:t>QoS </a:t>
+            </a:r>
+            <a:r>
+              <a:rPr lang="zh-CN" altLang="en-US" dirty="0"/>
+              <a:t>消融实验的设计思路是：在服务器出口链路上使用 </a:t>
+            </a:r>
+            <a:r>
+              <a:rPr lang="en-US" altLang="zh-CN" dirty="0"/>
+              <a:t>Linux </a:t>
+            </a:r>
+            <a:r>
+              <a:rPr lang="zh-CN" altLang="en-US" dirty="0"/>
+              <a:t>内核的 </a:t>
+            </a:r>
+            <a:r>
+              <a:rPr lang="en-US" altLang="zh-CN" dirty="0"/>
+              <a:t>HTB </a:t>
+            </a:r>
+            <a:r>
+              <a:rPr lang="zh-CN" altLang="en-US" dirty="0"/>
+              <a:t>队列调度，为财务处分配最高优先级 </a:t>
+            </a:r>
+            <a:r>
+              <a:rPr lang="en-US" altLang="zh-CN" dirty="0"/>
+              <a:t>prio=0，</a:t>
+            </a:r>
+            <a:r>
+              <a:rPr lang="zh-CN" altLang="en-US" dirty="0"/>
+              <a:t>保障带宽 12 </a:t>
+            </a:r>
+            <a:r>
+              <a:rPr lang="en-US" altLang="zh-CN" dirty="0"/>
+              <a:t>Mbps；</a:t>
+            </a:r>
+            <a:r>
+              <a:rPr lang="zh-CN" altLang="en-US" dirty="0"/>
+              <a:t>其他五个区域统一分配低优先级 </a:t>
+            </a:r>
+            <a:r>
+              <a:rPr lang="en-US" altLang="zh-CN" dirty="0"/>
+              <a:t>prio=7，</a:t>
+            </a:r>
+            <a:r>
+              <a:rPr lang="zh-CN" altLang="en-US" dirty="0"/>
+              <a:t>保障带宽各自 2 </a:t>
+            </a:r>
+            <a:r>
+              <a:rPr lang="en-US" altLang="zh-CN" dirty="0"/>
+              <a:t>Mbps。</a:t>
+            </a:r>
+            <a:endParaRPr lang="en-US" altLang="zh-CN" dirty="0"/>
+          </a:p>
+          <a:p>
+            <a:endParaRPr lang="en-US" altLang="zh-CN" dirty="0"/>
+          </a:p>
+          <a:p>
+            <a:r>
+              <a:rPr lang="en-US" altLang="zh-CN" dirty="0"/>
+              <a:t>HTB </a:t>
+            </a:r>
+            <a:r>
+              <a:rPr lang="zh-CN" altLang="en-US" dirty="0"/>
+              <a:t>的关键特性是：低优先级队列只有在高优先级队列的保障带宽得到满足之后，才能使用链路的剩余带宽。也就是说，当财务处需要带宽时，其他区域的流量会被抑制。</a:t>
+            </a:r>
+            <a:endParaRPr lang="zh-CN" altLang="en-US" dirty="0"/>
+          </a:p>
+          <a:p>
+            <a:endParaRPr lang="en-US" altLang="zh-CN" dirty="0"/>
+          </a:p>
+          <a:p>
+            <a:r>
+              <a:rPr lang="zh-CN" altLang="en-US" dirty="0"/>
+              <a:t>消融对比是 </a:t>
+            </a:r>
+            <a:r>
+              <a:rPr lang="en-US" altLang="zh-CN" dirty="0"/>
+              <a:t>Final </a:t>
+            </a:r>
+            <a:r>
+              <a:rPr lang="zh-CN" altLang="en-US" dirty="0"/>
+              <a:t>模型（有 </a:t>
+            </a:r>
+            <a:r>
+              <a:rPr lang="en-US" altLang="zh-CN" dirty="0"/>
+              <a:t>HTB）</a:t>
+            </a:r>
+            <a:r>
+              <a:rPr lang="zh-CN" altLang="en-US" dirty="0"/>
+              <a:t>和 </a:t>
+            </a:r>
+            <a:r>
+              <a:rPr lang="en-US" altLang="zh-CN" dirty="0"/>
+              <a:t>Final </a:t>
+            </a:r>
+            <a:r>
+              <a:rPr lang="zh-CN" altLang="en-US" dirty="0"/>
+              <a:t>消融 </a:t>
+            </a:r>
+            <a:r>
+              <a:rPr lang="en-US" altLang="zh-CN" dirty="0"/>
+              <a:t>HTB </a:t>
+            </a:r>
+            <a:r>
+              <a:rPr lang="zh-CN" altLang="en-US" dirty="0"/>
+              <a:t>模型（去掉 </a:t>
+            </a:r>
+            <a:r>
+              <a:rPr lang="en-US" altLang="zh-CN" dirty="0"/>
+              <a:t>HTB）。</a:t>
+            </a:r>
+            <a:r>
+              <a:rPr lang="zh-CN" altLang="en-US" dirty="0"/>
+              <a:t>我们在六个区域同时打 </a:t>
+            </a:r>
+            <a:r>
+              <a:rPr lang="en-US" altLang="zh-CN" dirty="0"/>
+              <a:t>iperf3 </a:t>
+            </a:r>
+            <a:r>
+              <a:rPr lang="zh-CN" altLang="en-US" dirty="0"/>
+              <a:t>流量，测量财务处的四维指标——吞吐量、时延、抖动和丢包率。</a:t>
+            </a:r>
+            <a:endParaRPr lang="zh-CN" altLang="en-US" dirty="0"/>
+          </a:p>
+          <a:p>
+            <a:endParaRPr lang="en-US" altLang="zh-CN" dirty="0"/>
+          </a:p>
+          <a:p>
+            <a:r>
+              <a:rPr lang="zh-CN" altLang="en-US" dirty="0"/>
+              <a:t>以右侧核心结果为例：开启 </a:t>
+            </a:r>
+            <a:r>
+              <a:rPr lang="en-US" altLang="zh-CN" dirty="0"/>
+              <a:t>HTB </a:t>
+            </a:r>
+            <a:r>
+              <a:rPr lang="zh-CN" altLang="en-US" dirty="0"/>
+              <a:t>后，财务处 </a:t>
+            </a:r>
+            <a:r>
+              <a:rPr lang="en-US" altLang="zh-CN" dirty="0"/>
+              <a:t>TCP </a:t>
+            </a:r>
+            <a:r>
+              <a:rPr lang="zh-CN" altLang="en-US" dirty="0"/>
+              <a:t>吞吐量从消融组的 </a:t>
+            </a:r>
+            <a:r>
+              <a:rPr lang="en-US" altLang="zh-CN" dirty="0"/>
+              <a:t>11.45Mbps </a:t>
+            </a:r>
+            <a:r>
+              <a:rPr lang="zh-CN" altLang="en-US" dirty="0"/>
+              <a:t>提升到 1</a:t>
+            </a:r>
+            <a:r>
+              <a:rPr lang="en-US" altLang="zh-CN" dirty="0"/>
+              <a:t>5.87</a:t>
+            </a:r>
+            <a:r>
+              <a:rPr lang="zh-CN" altLang="en-US" dirty="0"/>
+              <a:t> </a:t>
+            </a:r>
+            <a:r>
+              <a:rPr lang="en-US" altLang="zh-CN" dirty="0"/>
+              <a:t>Mbps</a:t>
+            </a:r>
+            <a:r>
+              <a:rPr lang="zh-CN" altLang="en-US" dirty="0"/>
+              <a:t>，抖动从</a:t>
+            </a:r>
+            <a:r>
+              <a:rPr lang="en-US" altLang="zh-CN" dirty="0"/>
+              <a:t>1.76ms </a:t>
+            </a:r>
+            <a:r>
+              <a:rPr lang="zh-CN" altLang="en-US" dirty="0"/>
+              <a:t>下降至</a:t>
+            </a:r>
+            <a:r>
+              <a:rPr lang="en-US" altLang="zh-CN" dirty="0"/>
+              <a:t>0.36ms</a:t>
+            </a:r>
+            <a:r>
+              <a:rPr lang="zh-CN" altLang="en-US" dirty="0"/>
+              <a:t>；丢包率保持</a:t>
+            </a:r>
+            <a:r>
+              <a:rPr lang="en-US" altLang="zh-CN" dirty="0"/>
+              <a:t>0</a:t>
+            </a:r>
+            <a:r>
+              <a:rPr lang="zh-CN" altLang="en-US" dirty="0"/>
+              <a:t>丢包</a:t>
+            </a:r>
+            <a:endParaRPr lang="zh-CN" altLang="en-US" dirty="0"/>
           </a:p>
         </p:txBody>
       </p:sp>
@@ -895,7 +1667,231 @@
           <a:bodyPr/>
           <a:lstStyle/>
           <a:p>
-            <a:endParaRPr lang="en-US" dirty="0"/>
+            <a:r>
+              <a:rPr lang="zh-CN" altLang="en-US" dirty="0"/>
+              <a:t>负载均衡实验的场景是：多台客户端向两台服务器发起 </a:t>
+            </a:r>
+            <a:r>
+              <a:rPr lang="en-US" altLang="zh-CN" dirty="0"/>
+              <a:t>iperf3</a:t>
+            </a:r>
+            <a:r>
+              <a:rPr lang="zh-CN" altLang="en-US" dirty="0"/>
+              <a:t>（网络性能测量工具，生成可控流量）</a:t>
+            </a:r>
+            <a:r>
+              <a:rPr lang="en-US" altLang="zh-CN" dirty="0"/>
+              <a:t> </a:t>
+            </a:r>
+            <a:r>
+              <a:rPr lang="zh-CN" altLang="en-US" dirty="0"/>
+              <a:t>下载请求，每台服务器的上行链路只有 20 </a:t>
+            </a:r>
+            <a:r>
+              <a:rPr lang="en-US" altLang="zh-CN" dirty="0"/>
+              <a:t>Mbps。</a:t>
+            </a:r>
+            <a:r>
+              <a:rPr lang="zh-CN" altLang="en-US" dirty="0"/>
+              <a:t>如果不做负载均衡，客户端可能会集中连接一台服务器，导致一边过载、另一边闲置。</a:t>
+            </a:r>
+            <a:endParaRPr lang="zh-CN" altLang="en-US" dirty="0"/>
+          </a:p>
+          <a:p>
+            <a:endParaRPr lang="en-US" altLang="zh-CN" dirty="0"/>
+          </a:p>
+          <a:p>
+            <a:r>
+              <a:rPr lang="zh-CN" altLang="en-US" dirty="0"/>
+              <a:t>我们实现了一个 </a:t>
+            </a:r>
+            <a:r>
+              <a:rPr lang="en-US" altLang="zh-CN" dirty="0"/>
+              <a:t>Python </a:t>
+            </a:r>
+            <a:r>
+              <a:rPr lang="zh-CN" altLang="en-US" dirty="0"/>
+              <a:t>层的 </a:t>
+            </a:r>
+            <a:r>
+              <a:rPr lang="en-US" altLang="zh-CN" dirty="0"/>
+              <a:t>Round Robin </a:t>
+            </a:r>
+            <a:r>
+              <a:rPr lang="zh-CN" altLang="en-US" dirty="0"/>
+              <a:t>调度器，用 </a:t>
+            </a:r>
+            <a:r>
+              <a:rPr lang="en-US" altLang="zh-CN" dirty="0"/>
+              <a:t>threading.Lock </a:t>
+            </a:r>
+            <a:r>
+              <a:rPr lang="zh-CN" altLang="en-US" dirty="0"/>
+              <a:t>保证线程安全——每个请求到来时轮流转发到 </a:t>
+            </a:r>
+            <a:r>
+              <a:rPr lang="en-US" altLang="zh-CN" dirty="0"/>
+              <a:t>S1 </a:t>
+            </a:r>
+            <a:r>
+              <a:rPr lang="zh-CN" altLang="en-US" dirty="0"/>
+              <a:t>和 </a:t>
+            </a:r>
+            <a:r>
+              <a:rPr lang="en-US" altLang="zh-CN" dirty="0"/>
+              <a:t>S2。</a:t>
+            </a:r>
+            <a:endParaRPr lang="en-US" altLang="zh-CN" dirty="0"/>
+          </a:p>
+          <a:p>
+            <a:endParaRPr lang="en-US" altLang="zh-CN" dirty="0"/>
+          </a:p>
+          <a:p>
+            <a:r>
+              <a:rPr lang="zh-CN" altLang="en-US" dirty="0"/>
+              <a:t>消融对比是 </a:t>
+            </a:r>
+            <a:r>
+              <a:rPr lang="en-US" altLang="zh-CN" dirty="0"/>
+              <a:t>Final </a:t>
+            </a:r>
+            <a:r>
+              <a:rPr lang="zh-CN" altLang="en-US" dirty="0"/>
+              <a:t>模型（</a:t>
+            </a:r>
+            <a:r>
+              <a:rPr lang="en-US" altLang="zh-CN" dirty="0"/>
+              <a:t>Round Robin）</a:t>
+            </a:r>
+            <a:r>
+              <a:rPr lang="zh-CN" altLang="en-US" dirty="0"/>
+              <a:t>和 </a:t>
+            </a:r>
+            <a:r>
+              <a:rPr lang="en-US" altLang="zh-CN" dirty="0"/>
+              <a:t>Final </a:t>
+            </a:r>
+            <a:r>
+              <a:rPr lang="zh-CN" altLang="en-US" dirty="0"/>
+              <a:t>消融 </a:t>
+            </a:r>
+            <a:r>
+              <a:rPr lang="en-US" altLang="zh-CN" dirty="0"/>
+              <a:t>LB </a:t>
+            </a:r>
+            <a:r>
+              <a:rPr lang="zh-CN" altLang="en-US" dirty="0"/>
+              <a:t>模型（去掉调度器，客户端静态绑定服务器）。</a:t>
+            </a:r>
+            <a:endParaRPr lang="zh-CN" altLang="en-US" dirty="0"/>
+          </a:p>
+          <a:p>
+            <a:endParaRPr lang="en-US" altLang="zh-CN" dirty="0"/>
+          </a:p>
+          <a:p>
+            <a:r>
+              <a:rPr lang="zh-CN" altLang="en-US" dirty="0"/>
+              <a:t>以场景 </a:t>
+            </a:r>
+            <a:r>
+              <a:rPr lang="en-US" altLang="zh-CN" dirty="0"/>
+              <a:t>B </a:t>
+            </a:r>
+            <a:r>
+              <a:rPr lang="zh-CN" altLang="en-US" dirty="0"/>
+              <a:t>的数据为例：去掉 </a:t>
+            </a:r>
+            <a:r>
+              <a:rPr lang="en-US" altLang="zh-CN" dirty="0"/>
+              <a:t>LB </a:t>
+            </a:r>
+            <a:r>
+              <a:rPr lang="zh-CN" altLang="en-US" dirty="0"/>
+              <a:t>后，</a:t>
+            </a:r>
+            <a:r>
+              <a:rPr lang="en-US" altLang="zh-CN" dirty="0"/>
+              <a:t>S1 </a:t>
+            </a:r>
+            <a:r>
+              <a:rPr lang="zh-CN" altLang="en-US" dirty="0"/>
+              <a:t>利用率达到 87.2%，</a:t>
+            </a:r>
+            <a:r>
+              <a:rPr lang="en-US" altLang="zh-CN" dirty="0"/>
+              <a:t>S2 </a:t>
+            </a:r>
+            <a:r>
+              <a:rPr lang="zh-CN" altLang="en-US" dirty="0"/>
+              <a:t>只有 47.0%，负载方差高达 405，严重不均衡，</a:t>
+            </a:r>
+            <a:r>
+              <a:rPr lang="en-US" altLang="zh-CN" dirty="0"/>
+              <a:t>Jain </a:t>
+            </a:r>
+            <a:r>
+              <a:rPr lang="zh-CN" altLang="en-US" dirty="0"/>
+              <a:t>公平指数仅 0.92。开启 </a:t>
+            </a:r>
+            <a:r>
+              <a:rPr lang="en-US" altLang="zh-CN" dirty="0"/>
+              <a:t>Round Robin </a:t>
+            </a:r>
+            <a:r>
+              <a:rPr lang="zh-CN" altLang="en-US" dirty="0"/>
+              <a:t>后，</a:t>
+            </a:r>
+            <a:r>
+              <a:rPr lang="en-US" altLang="zh-CN" dirty="0"/>
+              <a:t>S1 </a:t>
+            </a:r>
+            <a:r>
+              <a:rPr lang="zh-CN" altLang="en-US" dirty="0"/>
+              <a:t>利用率 70.0%，</a:t>
+            </a:r>
+            <a:r>
+              <a:rPr lang="en-US" altLang="zh-CN" dirty="0"/>
+              <a:t>S2 </a:t>
+            </a:r>
+            <a:r>
+              <a:rPr lang="zh-CN" altLang="en-US" dirty="0"/>
+              <a:t>利用率 66.8%，负载方差骤降到 2.53，</a:t>
+            </a:r>
+            <a:r>
+              <a:rPr lang="en-US" altLang="zh-CN" dirty="0"/>
+              <a:t>Jain </a:t>
+            </a:r>
+            <a:r>
+              <a:rPr lang="zh-CN" altLang="en-US" dirty="0"/>
+              <a:t>公平指数达到 0.9995，非常接近理论最优值 1.0。</a:t>
+            </a:r>
+            <a:endParaRPr lang="zh-CN" altLang="en-US" dirty="0"/>
+          </a:p>
+          <a:p>
+            <a:endParaRPr lang="en-US" altLang="zh-CN" dirty="0"/>
+          </a:p>
+          <a:p>
+            <a:r>
+              <a:rPr lang="zh-CN" altLang="en-US" dirty="0"/>
+              <a:t>从平均响应时间来看，</a:t>
+            </a:r>
+            <a:r>
+              <a:rPr lang="en-US" altLang="zh-CN" dirty="0"/>
+              <a:t>Round Robin </a:t>
+            </a:r>
+            <a:r>
+              <a:rPr lang="zh-CN" altLang="en-US" dirty="0"/>
+              <a:t>模式下每个请求平均只需要 4.7 秒，而静态绑定模式下要 8.0 秒。这说明均衡分配不仅提高了公平性，也直接改善了用户体验。核心结论是：</a:t>
+            </a:r>
+            <a:r>
+              <a:rPr lang="en-US" altLang="zh-CN" dirty="0"/>
+              <a:t>Round Robin </a:t>
+            </a:r>
+            <a:r>
+              <a:rPr lang="zh-CN" altLang="en-US" dirty="0"/>
+              <a:t>调度可以有效提高双服务器系统的资源利用效率，消除单点过载。</a:t>
+            </a:r>
+            <a:endParaRPr lang="zh-CN" altLang="en-US" dirty="0"/>
           </a:p>
         </p:txBody>
       </p:sp>
@@ -973,7 +1969,109 @@
           <a:bodyPr/>
           <a:lstStyle/>
           <a:p>
-            <a:endParaRPr lang="en-US" dirty="0"/>
+            <a:r>
+              <a:rPr lang="zh-CN" altLang="en-US" dirty="0"/>
+              <a:t>安全策略消融实验涵盖三个维度：</a:t>
+            </a:r>
+            <a:r>
+              <a:rPr lang="en-US" altLang="zh-CN" dirty="0"/>
+              <a:t>FLOOD </a:t>
+            </a:r>
+            <a:r>
+              <a:rPr lang="zh-CN" altLang="en-US" dirty="0"/>
+              <a:t>入侵检测、、以及 </a:t>
+            </a:r>
+            <a:r>
+              <a:rPr lang="en-US" altLang="zh-CN" dirty="0"/>
+              <a:t>SQLite </a:t>
+            </a:r>
+            <a:r>
+              <a:rPr lang="zh-CN" altLang="en-US" dirty="0"/>
+              <a:t>审计持久化存储。</a:t>
+            </a:r>
+            <a:endParaRPr lang="zh-CN" altLang="en-US" dirty="0"/>
+          </a:p>
+          <a:p>
+            <a:endParaRPr lang="en-US" altLang="zh-CN" dirty="0"/>
+          </a:p>
+          <a:p>
+            <a:r>
+              <a:rPr lang="en-US" altLang="zh-CN" dirty="0"/>
+              <a:t>ICMP Flood </a:t>
+            </a:r>
+            <a:r>
+              <a:rPr lang="zh-CN" altLang="en-US" dirty="0"/>
+              <a:t>防护使用 </a:t>
+            </a:r>
+            <a:r>
+              <a:rPr lang="en-US" altLang="zh-CN" dirty="0"/>
+              <a:t>iptables limit </a:t>
+            </a:r>
+            <a:r>
+              <a:rPr lang="zh-CN" altLang="en-US" dirty="0"/>
+              <a:t>模块限速 1 个包每秒——40 个 </a:t>
+            </a:r>
+            <a:r>
+              <a:rPr lang="en-US" altLang="zh-CN" dirty="0"/>
+              <a:t>ICMP </a:t>
+            </a:r>
+            <a:r>
+              <a:rPr lang="zh-CN" altLang="en-US" dirty="0"/>
+              <a:t>包只有约 5 个通过，防护效果明显。</a:t>
+            </a:r>
+            <a:endParaRPr lang="zh-CN" altLang="en-US" dirty="0"/>
+          </a:p>
+          <a:p>
+            <a:endParaRPr lang="en-US" altLang="zh-CN" dirty="0"/>
+          </a:p>
+          <a:p>
+            <a:r>
+              <a:rPr lang="zh-CN" altLang="en-US" dirty="0"/>
+              <a:t>端口扫描检测使用 10 秒滑动窗口，阈值 20 个端口，触发后自动封禁 300 秒。消融实验中扫描 30 个端口，有安全模块的组成功在第 20 端口处触发封禁，后续端口扫描全部失败。</a:t>
+            </a:r>
+            <a:endParaRPr lang="zh-CN" altLang="en-US" dirty="0"/>
+          </a:p>
+          <a:p>
+            <a:endParaRPr lang="en-US" altLang="zh-CN" dirty="0"/>
+          </a:p>
+          <a:p>
+            <a:r>
+              <a:rPr lang="en-US" altLang="zh-CN" dirty="0"/>
+              <a:t>SQLite </a:t>
+            </a:r>
+            <a:r>
+              <a:rPr lang="zh-CN" altLang="en-US" dirty="0"/>
+              <a:t>审计数据库记录了所有 </a:t>
+            </a:r>
+            <a:r>
+              <a:rPr lang="en-US" altLang="zh-CN" dirty="0"/>
+              <a:t>FLOOD、PORT_SCAN </a:t>
+            </a:r>
+            <a:r>
+              <a:rPr lang="zh-CN" altLang="en-US" dirty="0"/>
+              <a:t>和 </a:t>
+            </a:r>
+            <a:r>
+              <a:rPr lang="en-US" altLang="zh-CN" dirty="0"/>
+              <a:t>BAN </a:t>
+            </a:r>
+            <a:r>
+              <a:rPr lang="zh-CN" altLang="en-US" dirty="0"/>
+              <a:t>事件，实验组共生成 </a:t>
+            </a:r>
+            <a:r>
+              <a:rPr lang="en-US" altLang="zh-CN" dirty="0"/>
+              <a:t>3</a:t>
+            </a:r>
+            <a:r>
+              <a:rPr lang="zh-CN" altLang="en-US" dirty="0"/>
+              <a:t>条事件记录，</a:t>
+            </a:r>
+            <a:r>
+              <a:rPr lang="zh-CN" altLang="en-US" dirty="0"/>
+              <a:t>为系统运行状态分析和后续故障排查提供依据</a:t>
+            </a:r>
+            <a:endParaRPr lang="zh-CN" altLang="en-US" dirty="0"/>
           </a:p>
         </p:txBody>
       </p:sp>
@@ -1051,7 +2149,754 @@
           <a:bodyPr/>
           <a:lstStyle/>
           <a:p>
-            <a:endParaRPr lang="en-US" dirty="0"/>
+            <a:r>
+              <a:rPr lang="zh-CN" altLang="en-US" dirty="0"/>
+              <a:t>最后展示 </a:t>
+            </a:r>
+            <a:r>
+              <a:rPr lang="en-US" altLang="zh-CN" dirty="0"/>
+              <a:t>VPN </a:t>
+            </a:r>
+            <a:r>
+              <a:rPr lang="zh-CN" altLang="en-US" dirty="0"/>
+              <a:t>远程接入功能。我们在一台模拟家庭用户的 </a:t>
+            </a:r>
+            <a:r>
+              <a:rPr lang="en-US" altLang="zh-CN" dirty="0"/>
+              <a:t>home_pc </a:t>
+            </a:r>
+            <a:r>
+              <a:rPr lang="zh-CN" altLang="en-US" dirty="0"/>
+              <a:t>上配置了 </a:t>
+            </a:r>
+            <a:r>
+              <a:rPr lang="en-US" altLang="zh-CN" dirty="0"/>
+              <a:t>WireGuard </a:t>
+            </a:r>
+            <a:r>
+              <a:rPr lang="zh-CN" altLang="en-US" dirty="0"/>
+              <a:t>隧道，通过公网接入校园网。</a:t>
+            </a:r>
+            <a:endParaRPr lang="zh-CN" altLang="en-US" dirty="0"/>
+          </a:p>
+          <a:p>
+            <a:endParaRPr lang="en-US" altLang="zh-CN" dirty="0"/>
+          </a:p>
+          <a:p>
+            <a:r>
+              <a:rPr lang="zh-CN" altLang="en-US" dirty="0"/>
+              <a:t>我们采用了两层 </a:t>
+            </a:r>
+            <a:r>
+              <a:rPr lang="en-US" altLang="zh-CN" dirty="0"/>
+              <a:t>ACL </a:t>
+            </a:r>
+            <a:r>
+              <a:rPr lang="zh-CN" altLang="en-US" dirty="0"/>
+              <a:t>的安全设计。第一层是外部隔离：</a:t>
+            </a:r>
+            <a:r>
+              <a:rPr lang="en-US" altLang="zh-CN" dirty="0"/>
+              <a:t>VPN </a:t>
+            </a:r>
+            <a:r>
+              <a:rPr lang="zh-CN" altLang="en-US" dirty="0"/>
+              <a:t>关闭时，</a:t>
+            </a:r>
+            <a:r>
+              <a:rPr lang="en-US" altLang="zh-CN" dirty="0"/>
+              <a:t>home_pc </a:t>
+            </a:r>
+            <a:r>
+              <a:rPr lang="zh-CN" altLang="en-US" dirty="0"/>
+              <a:t>的物理 </a:t>
+            </a:r>
+            <a:r>
+              <a:rPr lang="en-US" altLang="zh-CN" dirty="0"/>
+              <a:t>IP 192.168.100.10 </a:t>
+            </a:r>
+            <a:r>
+              <a:rPr lang="zh-CN" altLang="en-US" dirty="0"/>
+              <a:t>在 </a:t>
+            </a:r>
+            <a:r>
+              <a:rPr lang="en-US" altLang="zh-CN" dirty="0"/>
+              <a:t>r1 </a:t>
+            </a:r>
+            <a:r>
+              <a:rPr lang="zh-CN" altLang="en-US" dirty="0"/>
+              <a:t>的 </a:t>
+            </a:r>
+            <a:r>
+              <a:rPr lang="en-US" altLang="zh-CN" dirty="0"/>
+              <a:t>FORWARD </a:t>
+            </a:r>
+            <a:r>
+              <a:rPr lang="zh-CN" altLang="en-US" dirty="0"/>
+              <a:t>链被全局 </a:t>
+            </a:r>
+            <a:r>
+              <a:rPr lang="en-US" altLang="zh-CN" dirty="0"/>
+              <a:t>DROP，</a:t>
+            </a:r>
+            <a:r>
+              <a:rPr lang="zh-CN" altLang="en-US" dirty="0"/>
+              <a:t>不能访问任何校内资源。第二层是校内 </a:t>
+            </a:r>
+            <a:r>
+              <a:rPr lang="en-US" altLang="zh-CN" dirty="0"/>
+              <a:t>ACL：VPN </a:t>
+            </a:r>
+            <a:r>
+              <a:rPr lang="zh-CN" altLang="en-US" dirty="0"/>
+              <a:t>建立后，隧道流量通过 </a:t>
+            </a:r>
+            <a:r>
+              <a:rPr lang="en-US" altLang="zh-CN" dirty="0"/>
+              <a:t>wg0(wg0 </a:t>
+            </a:r>
+            <a:r>
+              <a:rPr lang="zh-CN" altLang="en-US" dirty="0"/>
+              <a:t>是 </a:t>
+            </a:r>
+            <a:r>
+              <a:rPr lang="en-US" altLang="zh-CN" dirty="0"/>
+              <a:t>WireGuard VPN </a:t>
+            </a:r>
+            <a:r>
+              <a:rPr lang="zh-CN" altLang="en-US" dirty="0"/>
+              <a:t>的虚拟网络接口。</a:t>
+            </a:r>
+            <a:r>
+              <a:rPr lang="en-US" altLang="zh-CN" dirty="0"/>
+              <a:t>) </a:t>
+            </a:r>
+            <a:r>
+              <a:rPr lang="zh-CN" altLang="en-US" dirty="0"/>
+              <a:t>虚拟接口进入校园网，源地址变为 10.0.80.10，此时仍然不能访问财务处和人事处这两个敏感区域，但可以正常访问宿舍、教学、图书馆、办公等普通区域。</a:t>
+            </a:r>
+            <a:endParaRPr lang="zh-CN" altLang="en-US" dirty="0"/>
+          </a:p>
+          <a:p>
+            <a:endParaRPr lang="en-US" altLang="zh-CN" dirty="0"/>
+          </a:p>
+          <a:p>
+            <a:r>
+              <a:rPr lang="zh-CN" altLang="en-US" dirty="0"/>
+              <a:t>在 </a:t>
+            </a:r>
+            <a:r>
+              <a:rPr lang="en-US" altLang="zh-CN" dirty="0"/>
+              <a:t>PPT </a:t>
+            </a:r>
+            <a:r>
+              <a:rPr lang="zh-CN" altLang="en-US" dirty="0"/>
+              <a:t>的截图中可以看到：</a:t>
+            </a:r>
+            <a:r>
+              <a:rPr lang="en-US" altLang="zh-CN" dirty="0"/>
+              <a:t>VPN </a:t>
+            </a:r>
+            <a:r>
+              <a:rPr lang="zh-CN" altLang="en-US" dirty="0"/>
+              <a:t>关闭时，</a:t>
+            </a:r>
+            <a:r>
+              <a:rPr lang="en-US" altLang="zh-CN" dirty="0"/>
+              <a:t>home_pc </a:t>
+            </a:r>
+            <a:r>
+              <a:rPr lang="zh-CN" altLang="en-US" dirty="0"/>
+              <a:t>的 </a:t>
+            </a:r>
+            <a:r>
+              <a:rPr lang="en-US" altLang="zh-CN" dirty="0"/>
+              <a:t>PING </a:t>
+            </a:r>
+            <a:r>
+              <a:rPr lang="zh-CN" altLang="en-US" dirty="0"/>
+              <a:t>全部不通；开启 </a:t>
+            </a:r>
+            <a:r>
+              <a:rPr lang="en-US" altLang="zh-CN" dirty="0"/>
+              <a:t>VPN </a:t>
+            </a:r>
+            <a:r>
+              <a:rPr lang="zh-CN" altLang="en-US" dirty="0"/>
+              <a:t>后，</a:t>
+            </a:r>
+            <a:r>
+              <a:rPr lang="en-US" altLang="zh-CN" dirty="0"/>
+              <a:t>PING </a:t>
+            </a:r>
+            <a:r>
+              <a:rPr lang="zh-CN" altLang="en-US" dirty="0"/>
+              <a:t>普通区域成功但 </a:t>
+            </a:r>
+            <a:r>
+              <a:rPr lang="en-US" altLang="zh-CN" dirty="0"/>
+              <a:t>PING </a:t>
+            </a:r>
+            <a:r>
+              <a:rPr lang="zh-CN" altLang="en-US" dirty="0"/>
+              <a:t>财务处仍然被 </a:t>
+            </a:r>
+            <a:r>
+              <a:rPr lang="en-US" altLang="zh-CN" dirty="0"/>
+              <a:t>iptables </a:t>
+            </a:r>
+            <a:r>
+              <a:rPr lang="zh-CN" altLang="en-US" dirty="0"/>
+              <a:t>拦截。这验证了两层 </a:t>
+            </a:r>
+            <a:r>
+              <a:rPr lang="en-US" altLang="zh-CN" dirty="0"/>
+              <a:t>ACL </a:t>
+            </a:r>
+            <a:r>
+              <a:rPr lang="zh-CN" altLang="en-US" dirty="0"/>
+              <a:t>体系在真实网络流量中的有效拦截效果。</a:t>
+            </a:r>
+            <a:endParaRPr lang="zh-CN" altLang="en-US" dirty="0"/>
+          </a:p>
+          <a:p>
+            <a:endParaRPr lang="zh-CN" altLang="en-US" dirty="0"/>
+          </a:p>
+          <a:p>
+            <a:r>
+              <a:rPr lang="zh-CN" altLang="en-US" dirty="0"/>
+              <a:t>技术细节：步骤 1：建立 </a:t>
+            </a:r>
+            <a:r>
+              <a:rPr lang="en-US" altLang="zh-CN" dirty="0"/>
+              <a:t>WireGuard </a:t>
+            </a:r>
+            <a:r>
+              <a:rPr lang="zh-CN" altLang="en-US" dirty="0"/>
+              <a:t>隧道</a:t>
+            </a:r>
+            <a:endParaRPr lang="zh-CN" altLang="en-US" dirty="0"/>
+          </a:p>
+          <a:p>
+            <a:r>
+              <a:rPr lang="en-US" altLang="zh-CN" dirty="0"/>
+              <a:t>[VPN] </a:t>
+            </a:r>
+            <a:r>
+              <a:rPr lang="zh-CN" altLang="en-US" dirty="0"/>
+              <a:t>使用真实 </a:t>
+            </a:r>
+            <a:r>
+              <a:rPr lang="en-US" altLang="zh-CN" dirty="0"/>
+              <a:t>WireGuard </a:t>
+            </a:r>
+            <a:r>
+              <a:rPr lang="zh-CN" altLang="en-US" dirty="0"/>
+              <a:t>隧道模式...</a:t>
+            </a:r>
+            <a:endParaRPr lang="zh-CN" altLang="en-US" dirty="0"/>
+          </a:p>
+          <a:p>
+            <a:r>
+              <a:rPr lang="en-US" altLang="zh-CN" dirty="0"/>
+              <a:t>[VPN] </a:t>
+            </a:r>
+            <a:r>
+              <a:rPr lang="zh-CN" altLang="en-US" dirty="0"/>
+              <a:t>建立 </a:t>
+            </a:r>
+            <a:r>
+              <a:rPr lang="en-US" altLang="zh-CN" dirty="0"/>
+              <a:t>VPN </a:t>
+            </a:r>
+            <a:r>
+              <a:rPr lang="zh-CN" altLang="en-US" dirty="0"/>
+              <a:t>隧道 (</a:t>
+            </a:r>
+            <a:r>
+              <a:rPr lang="en-US" altLang="zh-CN" dirty="0"/>
+              <a:t>home_pc)...</a:t>
+            </a:r>
+            <a:endParaRPr lang="en-US" altLang="zh-CN" dirty="0"/>
+          </a:p>
+          <a:p>
+            <a:r>
+              <a:rPr lang="en-US" altLang="zh-CN" dirty="0"/>
+              <a:t>[VPN] </a:t>
+            </a:r>
+            <a:r>
+              <a:rPr lang="zh-CN" altLang="en-US" dirty="0"/>
+              <a:t>客户端密钥已生成</a:t>
+            </a:r>
+            <a:endParaRPr lang="zh-CN" altLang="en-US" dirty="0"/>
+          </a:p>
+          <a:p>
+            <a:r>
+              <a:rPr lang="en-US" altLang="zh-CN" dirty="0"/>
+              <a:t>[VPN] </a:t>
+            </a:r>
+            <a:r>
+              <a:rPr lang="zh-CN" altLang="en-US" dirty="0"/>
+              <a:t>隧道已建立!</a:t>
+            </a:r>
+            <a:endParaRPr lang="zh-CN" altLang="en-US" dirty="0"/>
+          </a:p>
+          <a:p>
+            <a:r>
+              <a:rPr lang="zh-CN" altLang="en-US" dirty="0"/>
+              <a:t>技术动作：</a:t>
+            </a:r>
+            <a:endParaRPr lang="zh-CN" altLang="en-US" dirty="0"/>
+          </a:p>
+          <a:p>
+            <a:endParaRPr lang="en-US" altLang="zh-CN" dirty="0"/>
+          </a:p>
+          <a:p>
+            <a:r>
+              <a:rPr lang="en-US" altLang="zh-CN" dirty="0"/>
+              <a:t>r1（</a:t>
+            </a:r>
+            <a:r>
+              <a:rPr lang="zh-CN" altLang="en-US" dirty="0"/>
+              <a:t>服务端）：创建 </a:t>
+            </a:r>
+            <a:r>
+              <a:rPr lang="en-US" altLang="zh-CN" dirty="0"/>
+              <a:t>wg0 </a:t>
+            </a:r>
+            <a:r>
+              <a:rPr lang="zh-CN" altLang="en-US" dirty="0"/>
+              <a:t>接口，分配 </a:t>
+            </a:r>
+            <a:r>
+              <a:rPr lang="en-US" altLang="zh-CN" dirty="0"/>
+              <a:t>IP 10.0.80.1/24，</a:t>
+            </a:r>
+            <a:r>
+              <a:rPr lang="zh-CN" altLang="en-US" dirty="0"/>
+              <a:t>监听 </a:t>
+            </a:r>
+            <a:r>
+              <a:rPr lang="en-US" altLang="zh-CN" dirty="0"/>
+              <a:t>UDP 51820</a:t>
+            </a:r>
+            <a:endParaRPr lang="en-US" altLang="zh-CN" dirty="0"/>
+          </a:p>
+          <a:p>
+            <a:r>
+              <a:rPr lang="en-US" altLang="zh-CN" dirty="0"/>
+              <a:t>home_pc（</a:t>
+            </a:r>
+            <a:r>
+              <a:rPr lang="zh-CN" altLang="en-US" dirty="0"/>
+              <a:t>客户端）：创建 </a:t>
+            </a:r>
+            <a:r>
+              <a:rPr lang="en-US" altLang="zh-CN" dirty="0"/>
+              <a:t>wg0 </a:t>
+            </a:r>
+            <a:r>
+              <a:rPr lang="zh-CN" altLang="en-US" dirty="0"/>
+              <a:t>接口，分配 </a:t>
+            </a:r>
+            <a:r>
+              <a:rPr lang="en-US" altLang="zh-CN" dirty="0"/>
+              <a:t>IP 10.0.80.10/24</a:t>
+            </a:r>
+            <a:endParaRPr lang="en-US" altLang="zh-CN" dirty="0"/>
+          </a:p>
+          <a:p>
+            <a:r>
+              <a:rPr lang="zh-CN" altLang="en-US" dirty="0"/>
+              <a:t>双方交换公钥，建立加密隧道</a:t>
+            </a:r>
+            <a:endParaRPr lang="zh-CN" altLang="en-US" dirty="0"/>
+          </a:p>
+          <a:p>
+            <a:r>
+              <a:rPr lang="zh-CN" altLang="en-US" dirty="0"/>
+              <a:t>步骤 2：密钥交换验证</a:t>
+            </a:r>
+            <a:endParaRPr lang="zh-CN" altLang="en-US" dirty="0"/>
+          </a:p>
+          <a:p>
+            <a:r>
+              <a:rPr lang="zh-CN" altLang="en-US" dirty="0"/>
+              <a:t>截图中的 </a:t>
+            </a:r>
+            <a:r>
+              <a:rPr lang="en-US" altLang="zh-CN" dirty="0"/>
+              <a:t>wg show </a:t>
+            </a:r>
+            <a:r>
+              <a:rPr lang="zh-CN" altLang="en-US" dirty="0"/>
+              <a:t>输出：</a:t>
+            </a:r>
+            <a:endParaRPr lang="zh-CN" altLang="en-US" dirty="0"/>
+          </a:p>
+          <a:p>
+            <a:endParaRPr lang="en-US" altLang="zh-CN" dirty="0"/>
+          </a:p>
+          <a:p>
+            <a:r>
+              <a:rPr lang="en-US" altLang="zh-CN" dirty="0"/>
+              <a:t>r1 </a:t>
+            </a:r>
+            <a:r>
+              <a:rPr lang="zh-CN" altLang="en-US" dirty="0"/>
+              <a:t>上的 </a:t>
+            </a:r>
+            <a:r>
+              <a:rPr lang="en-US" altLang="zh-CN" dirty="0"/>
+              <a:t>peer（</a:t>
+            </a:r>
+            <a:r>
+              <a:rPr lang="zh-CN" altLang="en-US" dirty="0"/>
+              <a:t>对端）:</a:t>
+            </a:r>
+            <a:endParaRPr lang="zh-CN" altLang="en-US" dirty="0"/>
+          </a:p>
+          <a:p>
+            <a:r>
+              <a:rPr lang="en-US" altLang="zh-CN" dirty="0"/>
+              <a:t>  public key: evS5SWyyRKIH8SHuhEiHZxG4TXwiPEypwiyVwvNqSwE=  &lt;- home_pc </a:t>
+            </a:r>
+            <a:r>
+              <a:rPr lang="zh-CN" altLang="en-US" dirty="0"/>
+              <a:t>的公钥</a:t>
+            </a:r>
+            <a:endParaRPr lang="zh-CN" altLang="en-US" dirty="0"/>
+          </a:p>
+          <a:p>
+            <a:r>
+              <a:rPr lang="en-US" altLang="zh-CN" dirty="0"/>
+              <a:t>  endpoint: 192.168.10.10:39381                          &lt;- home_pc </a:t>
+            </a:r>
+            <a:r>
+              <a:rPr lang="zh-CN" altLang="en-US" dirty="0"/>
+              <a:t>物理地址</a:t>
+            </a:r>
+            <a:endParaRPr lang="zh-CN" altLang="en-US" dirty="0"/>
+          </a:p>
+          <a:p>
+            <a:r>
+              <a:rPr lang="en-US" altLang="zh-CN" dirty="0"/>
+              <a:t>  allowed ips: 10.0.80.10/32                             &lt;- </a:t>
+            </a:r>
+            <a:r>
+              <a:rPr lang="zh-CN" altLang="en-US" dirty="0"/>
+              <a:t>允许该公钥的流量源</a:t>
+            </a:r>
+            <a:r>
+              <a:rPr lang="en-US" altLang="zh-CN" dirty="0"/>
+              <a:t>IP</a:t>
+            </a:r>
+            <a:endParaRPr lang="en-US" altLang="zh-CN" dirty="0"/>
+          </a:p>
+          <a:p>
+            <a:r>
+              <a:rPr lang="en-US" altLang="zh-CN" dirty="0"/>
+              <a:t>  transfer: 180 B received, 92 B sent                    &lt;- </a:t>
+            </a:r>
+            <a:r>
+              <a:rPr lang="zh-CN" altLang="en-US" dirty="0"/>
+              <a:t>已有数据交换</a:t>
+            </a:r>
+            <a:endParaRPr lang="zh-CN" altLang="en-US" dirty="0"/>
+          </a:p>
+          <a:p>
+            <a:r>
+              <a:rPr lang="zh-CN" altLang="en-US" dirty="0"/>
+              <a:t>这说明隧道已双向打通，加密通道正常工作。</a:t>
+            </a:r>
+            <a:endParaRPr lang="zh-CN" altLang="en-US" dirty="0"/>
+          </a:p>
+          <a:p>
+            <a:endParaRPr lang="en-US" altLang="zh-CN" dirty="0"/>
+          </a:p>
+          <a:p>
+            <a:r>
+              <a:rPr lang="zh-CN" altLang="en-US" dirty="0"/>
+              <a:t>步骤 3：应用两层 </a:t>
+            </a:r>
+            <a:r>
+              <a:rPr lang="en-US" altLang="zh-CN" dirty="0"/>
+              <a:t>ACL</a:t>
+            </a:r>
+            <a:endParaRPr lang="en-US" altLang="zh-CN" dirty="0"/>
+          </a:p>
+          <a:p>
+            <a:r>
+              <a:rPr lang="en-US" altLang="zh-CN" dirty="0"/>
+              <a:t>[ACL] [REAL_VPN] </a:t>
+            </a:r>
+            <a:r>
+              <a:rPr lang="zh-CN" altLang="en-US" dirty="0"/>
+              <a:t>应用 </a:t>
+            </a:r>
+            <a:r>
+              <a:rPr lang="en-US" altLang="zh-CN" dirty="0"/>
+              <a:t>VPN </a:t>
+            </a:r>
+            <a:r>
+              <a:rPr lang="zh-CN" altLang="en-US" dirty="0"/>
+              <a:t>用户 </a:t>
+            </a:r>
+            <a:r>
+              <a:rPr lang="en-US" altLang="zh-CN" dirty="0"/>
+              <a:t>ACL </a:t>
+            </a:r>
+            <a:r>
+              <a:rPr lang="zh-CN" altLang="en-US" dirty="0"/>
+              <a:t>规则...</a:t>
+            </a:r>
+            <a:endParaRPr lang="zh-CN" altLang="en-US" dirty="0"/>
+          </a:p>
+          <a:p>
+            <a:r>
+              <a:rPr lang="en-US" altLang="zh-CN" dirty="0"/>
+              <a:t>  [ACL] </a:t>
+            </a:r>
+            <a:r>
+              <a:rPr lang="zh-CN" altLang="en-US" dirty="0"/>
+              <a:t>匹配条件: -</a:t>
+            </a:r>
+            <a:r>
+              <a:rPr lang="en-US" altLang="zh-CN" dirty="0"/>
+              <a:t>i wg0 </a:t>
+            </a:r>
+            <a:r>
+              <a:rPr lang="zh-CN" altLang="en-US" dirty="0"/>
+              <a:t>或 -</a:t>
+            </a:r>
+            <a:r>
+              <a:rPr lang="en-US" altLang="zh-CN" dirty="0"/>
+              <a:t>s 10.0.80.0/24</a:t>
+            </a:r>
+            <a:endParaRPr lang="en-US" altLang="zh-CN" dirty="0"/>
+          </a:p>
+          <a:p>
+            <a:r>
+              <a:rPr lang="en-US" altLang="zh-CN" dirty="0"/>
+              <a:t>  [-] VPN </a:t>
+            </a:r>
+            <a:r>
+              <a:rPr lang="zh-CN" altLang="en-US" dirty="0"/>
+              <a:t>用户 (10.0.80.0/24): 禁止访问财务处/人事处</a:t>
+            </a:r>
+            <a:endParaRPr lang="zh-CN" altLang="en-US" dirty="0"/>
+          </a:p>
+          <a:p>
+            <a:r>
+              <a:rPr lang="en-US" altLang="zh-CN" dirty="0"/>
+              <a:t>  [+] VPN </a:t>
+            </a:r>
+            <a:r>
+              <a:rPr lang="zh-CN" altLang="en-US" dirty="0"/>
+              <a:t>用户 (10.0.80.0/24): 允许访问普通区域</a:t>
+            </a:r>
+            <a:endParaRPr lang="zh-CN" altLang="en-US" dirty="0"/>
+          </a:p>
+          <a:p>
+            <a:r>
+              <a:rPr lang="zh-CN" altLang="en-US" dirty="0"/>
+              <a:t>技术动作：</a:t>
+            </a:r>
+            <a:endParaRPr lang="zh-CN" altLang="en-US" dirty="0"/>
+          </a:p>
+          <a:p>
+            <a:endParaRPr lang="en-US" altLang="zh-CN" dirty="0"/>
+          </a:p>
+          <a:p>
+            <a:r>
+              <a:rPr lang="zh-CN" altLang="en-US" dirty="0"/>
+              <a:t>删除外部隔离规则（192.168.100.10 -</a:t>
+            </a:r>
+            <a:r>
+              <a:rPr lang="en-US" altLang="zh-CN" dirty="0"/>
+              <a:t>j DROP）</a:t>
+            </a:r>
+            <a:endParaRPr lang="en-US" altLang="zh-CN" dirty="0"/>
+          </a:p>
+          <a:p>
+            <a:r>
+              <a:rPr lang="zh-CN" altLang="en-US" dirty="0"/>
+              <a:t>添加 </a:t>
+            </a:r>
+            <a:r>
+              <a:rPr lang="en-US" altLang="zh-CN" dirty="0"/>
+              <a:t>VPN ACL </a:t>
+            </a:r>
+            <a:r>
+              <a:rPr lang="zh-CN" altLang="en-US" dirty="0"/>
+              <a:t>规则：-</a:t>
+            </a:r>
+            <a:r>
+              <a:rPr lang="en-US" altLang="zh-CN" dirty="0"/>
+              <a:t>i wg0 -d 10.0.35.0/26 -j DROP（</a:t>
+            </a:r>
+            <a:r>
+              <a:rPr lang="zh-CN" altLang="en-US" dirty="0"/>
+              <a:t>禁止访问财务处）</a:t>
+            </a:r>
+            <a:endParaRPr lang="zh-CN" altLang="en-US" dirty="0"/>
+          </a:p>
+          <a:p>
+            <a:r>
+              <a:rPr lang="zh-CN" altLang="en-US" dirty="0"/>
+              <a:t>添加放行规则：-</a:t>
+            </a:r>
+            <a:r>
+              <a:rPr lang="en-US" altLang="zh-CN" dirty="0"/>
+              <a:t>i wg0 -j ACCEPT（</a:t>
+            </a:r>
+            <a:r>
+              <a:rPr lang="zh-CN" altLang="en-US" dirty="0"/>
+              <a:t>允许访问其他区域）</a:t>
+            </a:r>
+            <a:endParaRPr lang="zh-CN" altLang="en-US" dirty="0"/>
+          </a:p>
+          <a:p>
+            <a:r>
+              <a:rPr lang="zh-CN" altLang="en-US" dirty="0"/>
+              <a:t>步骤 4：身份切换</a:t>
+            </a:r>
+            <a:endParaRPr lang="zh-CN" altLang="en-US" dirty="0"/>
+          </a:p>
+          <a:p>
+            <a:r>
+              <a:rPr lang="en-US" altLang="zh-CN" dirty="0"/>
+              <a:t>[VPN] </a:t>
+            </a:r>
+            <a:r>
+              <a:rPr lang="zh-CN" altLang="en-US" dirty="0"/>
+              <a:t>虚拟 </a:t>
+            </a:r>
+            <a:r>
+              <a:rPr lang="en-US" altLang="zh-CN" dirty="0"/>
+              <a:t>IP: 10.0.80.10 (WireGuard </a:t>
+            </a:r>
+            <a:r>
+              <a:rPr lang="zh-CN" altLang="en-US" dirty="0"/>
+              <a:t>隧道，真实分配)</a:t>
+            </a:r>
+            <a:endParaRPr lang="zh-CN" altLang="en-US" dirty="0"/>
+          </a:p>
+          <a:p>
+            <a:r>
+              <a:rPr lang="en-US" altLang="zh-CN" dirty="0"/>
+              <a:t>[VPN] </a:t>
+            </a:r>
+            <a:r>
+              <a:rPr lang="zh-CN" altLang="en-US" dirty="0"/>
+              <a:t>权限: 通过 </a:t>
+            </a:r>
+            <a:r>
+              <a:rPr lang="en-US" altLang="zh-CN" dirty="0"/>
+              <a:t>wg0 </a:t>
+            </a:r>
+            <a:r>
+              <a:rPr lang="zh-CN" altLang="en-US" dirty="0"/>
+              <a:t>接口访问校内网</a:t>
+            </a:r>
+            <a:endParaRPr lang="zh-CN" altLang="en-US" dirty="0"/>
+          </a:p>
+          <a:p>
+            <a:r>
+              <a:rPr lang="en-US" altLang="zh-CN" dirty="0"/>
+              <a:t>[VPN] </a:t>
+            </a:r>
+            <a:r>
+              <a:rPr lang="zh-CN" altLang="en-US" dirty="0"/>
+              <a:t>可访问: 宿舍/教学/图书馆/办公/服务器</a:t>
+            </a:r>
+            <a:endParaRPr lang="zh-CN" altLang="en-US" dirty="0"/>
+          </a:p>
+          <a:p>
+            <a:r>
+              <a:rPr lang="en-US" altLang="zh-CN" dirty="0"/>
+              <a:t>[VPN] </a:t>
+            </a:r>
+            <a:r>
+              <a:rPr lang="zh-CN" altLang="en-US" dirty="0"/>
+              <a:t>禁止: 财务处(10.0.35.0/26)/人事处(10.0.35.64/26)</a:t>
+            </a:r>
+            <a:endParaRPr lang="zh-CN" altLang="en-US" dirty="0"/>
+          </a:p>
+          <a:p>
+            <a:r>
+              <a:rPr lang="zh-CN" altLang="en-US" dirty="0"/>
+              <a:t>最终效果：</a:t>
+            </a:r>
+            <a:endParaRPr lang="zh-CN" altLang="en-US" dirty="0"/>
+          </a:p>
+          <a:p>
+            <a:endParaRPr lang="en-US" altLang="zh-CN" dirty="0"/>
+          </a:p>
+          <a:p>
+            <a:r>
+              <a:rPr lang="en-US" altLang="zh-CN" dirty="0"/>
+              <a:t>home_pc </a:t>
+            </a:r>
+            <a:r>
+              <a:rPr lang="zh-CN" altLang="en-US" dirty="0"/>
+              <a:t>从 </a:t>
+            </a:r>
+            <a:r>
+              <a:rPr lang="en-US" altLang="zh-CN" dirty="0"/>
+              <a:t>HOME_USER </a:t>
+            </a:r>
+            <a:r>
+              <a:rPr lang="zh-CN" altLang="en-US" dirty="0"/>
+              <a:t>身份切换为 </a:t>
+            </a:r>
+            <a:r>
+              <a:rPr lang="en-US" altLang="zh-CN" dirty="0"/>
+              <a:t>VPN_USER</a:t>
+            </a:r>
+            <a:endParaRPr lang="en-US" altLang="zh-CN" dirty="0"/>
+          </a:p>
+          <a:p>
+            <a:r>
+              <a:rPr lang="zh-CN" altLang="en-US" dirty="0"/>
+              <a:t>流量路径：</a:t>
+            </a:r>
+            <a:r>
+              <a:rPr lang="en-US" altLang="zh-CN" dirty="0"/>
+              <a:t>home_pc → (</a:t>
+            </a:r>
+            <a:r>
+              <a:rPr lang="zh-CN" altLang="en-US" dirty="0"/>
+              <a:t>加密隧道) → </a:t>
+            </a:r>
+            <a:r>
+              <a:rPr lang="en-US" altLang="zh-CN" dirty="0"/>
+              <a:t>r1:wg0 → (</a:t>
+            </a:r>
+            <a:r>
+              <a:rPr lang="zh-CN" altLang="en-US" dirty="0"/>
+              <a:t>解密) → 校内网</a:t>
+            </a:r>
+            <a:endParaRPr lang="zh-CN" altLang="en-US" dirty="0"/>
+          </a:p>
+          <a:p>
+            <a:r>
+              <a:rPr lang="en-US" altLang="zh-CN" dirty="0"/>
+              <a:t>ACL </a:t>
+            </a:r>
+            <a:r>
+              <a:rPr lang="zh-CN" altLang="en-US" dirty="0"/>
+              <a:t>生效：普通区域可达，敏感区域被 </a:t>
+            </a:r>
+            <a:r>
+              <a:rPr lang="en-US" altLang="zh-CN" dirty="0"/>
+              <a:t>iptables </a:t>
+            </a:r>
+            <a:r>
+              <a:rPr lang="zh-CN" altLang="en-US" dirty="0"/>
+              <a:t>拦截</a:t>
+            </a:r>
+            <a:endParaRPr lang="zh-CN" altLang="en-US" dirty="0"/>
           </a:p>
         </p:txBody>
       </p:sp>
@@ -7327,7 +9172,7 @@
                 <a:ea typeface="微软雅黑" panose="020B0503020204020204" pitchFamily="34" charset="-122"/>
                 <a:cs typeface="微软雅黑" panose="020B0503020204020204" pitchFamily="34" charset="-120"/>
               </a:rPr>
-              <a:t>40.0%</a:t>
+              <a:t>68.4%</a:t>
             </a:r>
             <a:endParaRPr lang="en-US" sz="1000" dirty="0"/>
           </a:p>
@@ -7475,7 +9320,7 @@
                 <a:ea typeface="微软雅黑" panose="020B0503020204020204" pitchFamily="34" charset="-122"/>
                 <a:cs typeface="微软雅黑" panose="020B0503020204020204" pitchFamily="34" charset="-120"/>
               </a:rPr>
-              <a:t>68.4%</a:t>
+              <a:t>40.0%</a:t>
             </a:r>
             <a:endParaRPr lang="en-US" sz="1000" dirty="0"/>
           </a:p>
